--- a/presentations/16-assembly-meets-c/16-assembly-meets-c-lab.pptx
+++ b/presentations/16-assembly-meets-c/16-assembly-meets-c-lab.pptx
@@ -133,7 +133,7 @@
   <p:extLst>
     <p:ext uri="{521415D9-36F7-43E2-AB2F-B90AF26B5E84}">
       <p14:sectionLst xmlns:p14="http://schemas.microsoft.com/office/powerpoint/2010/main">
-        <p14:section name="Opening" id="{94734dbf-606e-7b38-9419-e5a0138049df}">
+        <p14:section name="Opening" id="{31c355b3-03ec-1cb6-6e2b-c3fc4efe602b}">
           <p14:sldIdLst>
             <p14:sldId id="256"/>
             <p14:sldId id="257"/>
@@ -141,14 +141,14 @@
             <p14:sldId id="259"/>
           </p14:sldIdLst>
         </p14:section>
-        <p14:section name="Generate" id="{0db92ee2-e1f7-f5e8-c470-7c15024dc4ff}">
+        <p14:section name="Generate" id="{6996c922-e629-17d2-f628-ddc2a62d4cb9}">
           <p14:sldIdLst>
             <p14:sldId id="260"/>
             <p14:sldId id="261"/>
             <p14:sldId id="262"/>
           </p14:sldIdLst>
         </p14:section>
-        <p14:section name="Read -O0" id="{b65690ce-bfd9-b12d-d2dc-cf654f64ca18}">
+        <p14:section name="Read -O0" id="{1e2e5adb-0852-dfe5-15be-fdac5155db28}">
           <p14:sldIdLst>
             <p14:sldId id="263"/>
             <p14:sldId id="264"/>
@@ -159,7 +159,7 @@
             <p14:sldId id="269"/>
           </p14:sldIdLst>
         </p14:section>
-        <p14:section name="Read -Os" id="{973f06a1-cb4d-e05f-08e0-6cdfd6149b34}">
+        <p14:section name="Read -Os" id="{012cbb1f-ef49-7745-27c6-b03ccadde650}">
           <p14:sldIdLst>
             <p14:sldId id="270"/>
             <p14:sldId id="271"/>
@@ -168,7 +168,7 @@
             <p14:sldId id="274"/>
           </p14:sldIdLst>
         </p14:section>
-        <p14:section name="Compare" id="{084e87dd-c447-105f-40f2-b4b1bc31bb7c}">
+        <p14:section name="Compare" id="{6ae501d4-b213-78ef-091c-30ea00e8f777}">
           <p14:sldIdLst>
             <p14:sldId id="275"/>
             <p14:sldId id="276"/>
@@ -176,14 +176,14 @@
             <p14:sldId id="278"/>
           </p14:sldIdLst>
         </p14:section>
-        <p14:section name="In the debugger" id="{4bd97093-50ff-b26e-2630-faf05aac3a96}">
+        <p14:section name="In the debugger" id="{cb0b7aaf-8968-5ee2-e679-d4d6473e63f0}">
           <p14:sldIdLst>
             <p14:sldId id="279"/>
             <p14:sldId id="280"/>
             <p14:sldId id="281"/>
           </p14:sldIdLst>
         </p14:section>
-        <p14:section name="Closing" id="{b88ba969-cfe1-2b82-cea6-7de9bb107fee}">
+        <p14:section name="Closing" id="{87101acb-0e6a-5c48-bc6e-693367162997}">
           <p14:sldIdLst>
             <p14:sldId id="282"/>
           </p14:sldIdLst>
